--- a/assets/pptx/catalog-654.pptx
+++ b/assets/pptx/catalog-654.pptx
@@ -3255,7 +3255,7 @@
                 <a:ea typeface="Ebrima"/>
                 <a:cs typeface="Ebrima"/>
               </a:rPr>
-              <a:t>(2x)</a:t>
+              <a:t>2x</a:t>
             </a:r>
           </a:p>
         </p:txBody>
@@ -3322,7 +3322,7 @@
                 <a:ea typeface="Ebrima"/>
                 <a:cs typeface="Ebrima"/>
               </a:rPr>
-              <a:t>ያደረኩትን ሁሉ የልቤን ነገረኝ ኃጥያቴን ሻረና ከሰው ቀላቀለኝ አምላኬ ነው ጌታዬ ነው እኔ አመልከዋለሁ (2x)</a:t>
+              <a:t>ያደረኩትን ሁሉ የልቤን ነገረኝ ኃጥያቴን ሻረና ከሰው ቀላቀለኝ አምላኬ ነው ጌታዬ ነው እኔ አመልከዋለሁ 2x</a:t>
             </a:r>
           </a:p>
         </p:txBody>
@@ -3590,7 +3590,7 @@
                 <a:ea typeface="Ebrima"/>
                 <a:cs typeface="Ebrima"/>
               </a:rPr>
-              <a:t>(2x)</a:t>
+              <a:t>2x</a:t>
             </a:r>
           </a:p>
         </p:txBody>
@@ -3925,7 +3925,7 @@
                 <a:ea typeface="Ebrima"/>
                 <a:cs typeface="Ebrima"/>
               </a:rPr>
-              <a:t>(2x)</a:t>
+              <a:t>2x</a:t>
             </a:r>
           </a:p>
         </p:txBody>
@@ -3992,7 +3992,7 @@
                 <a:ea typeface="Ebrima"/>
                 <a:cs typeface="Ebrima"/>
               </a:rPr>
-              <a:t>በዘለዓለም ሥሙ ቃልኪዳን ገባልኝ አንቺ ልጅ በሕይወት ትኖሪያለሽ አለኝ ጌታዬ ነው አዳኜ ነው እኔ እወደዋለሁ (2x)</a:t>
+              <a:t>በዘለዓለም ሥሙ ቃልኪዳን ገባልኝ አንቺ ልጅ በሕይወት ትኖሪያለሽ አለኝ ጌታዬ ነው አዳኜ ነው እኔ እወደዋለሁ 2x</a:t>
             </a:r>
           </a:p>
         </p:txBody>
